--- a/decks/FrameDrops_Investor_Deck.pptx
+++ b/decks/FrameDrops_Investor_Deck.pptx
@@ -12317,7 +12317,7 @@
                 </a:solidFill>
                 <a:latin typeface="Inter"/>
               </a:rPr>
-              <a:t>Pay per album, ₹29–₹349</a:t>
+              <a:t>Pay per album, ₹149–₹299 (launch)</a:t>
             </a:r>
           </a:p>
         </p:txBody>
@@ -14721,7 +14721,7 @@
                 </a:solidFill>
                 <a:latin typeface="Inter Tight"/>
               </a:rPr>
-              <a:t>₹29 – ₹349</a:t>
+              <a:t>₹149 – ₹299</a:t>
             </a:r>
           </a:p>
         </p:txBody>
@@ -14799,7 +14799,7 @@
                 </a:solidFill>
                 <a:latin typeface="Inter"/>
               </a:rPr>
-              <a:t>Tiered by image count. Photographers</a:t>
+              <a:t>3 tiers by image count. Photographers</a:t>
             </a:r>
           </a:p>
           <a:p>
@@ -14815,7 +14815,7 @@
                 </a:solidFill>
                 <a:latin typeface="Inter"/>
               </a:rPr>
-              <a:t>pay to unlock client downloads after</a:t>
+              <a:t>pay to unlock client deliveries after</a:t>
             </a:r>
           </a:p>
           <a:p>
@@ -15338,7 +15338,7 @@
                 </a:solidFill>
                 <a:latin typeface="Inter Tight"/>
               </a:rPr>
-              <a:t>98% gross margin. Profitable from photographer #1.</a:t>
+              <a:t>99% gross margin. Profitable from photographer #1.</a:t>
             </a:r>
           </a:p>
         </p:txBody>
@@ -15467,7 +15467,7 @@
                 </a:solidFill>
                 <a:latin typeface="Inter Tight"/>
               </a:rPr>
-              <a:t>₹511</a:t>
+              <a:t>₹387</a:t>
             </a:r>
           </a:p>
         </p:txBody>
@@ -15522,7 +15522,7 @@
                 </a:solidFill>
                 <a:latin typeface="Inter"/>
               </a:rPr>
-              <a:t>photographer / month</a:t>
+              <a:t>photographer / mo (launch)</a:t>
             </a:r>
           </a:p>
         </p:txBody>
@@ -15706,7 +15706,7 @@
                 </a:solidFill>
                 <a:latin typeface="Inter"/>
               </a:rPr>
-              <a:t>photographer / month</a:t>
+              <a:t>photographer / mo (launch)</a:t>
             </a:r>
           </a:p>
         </p:txBody>
@@ -15835,7 +15835,7 @@
                 </a:solidFill>
                 <a:latin typeface="Inter Tight"/>
               </a:rPr>
-              <a:t>98%</a:t>
+              <a:t>99%</a:t>
             </a:r>
           </a:p>
         </p:txBody>
@@ -15890,7 +15890,7 @@
                 </a:solidFill>
                 <a:latin typeface="Inter"/>
               </a:rPr>
-              <a:t>at 10K photographers</a:t>
+              <a:t>at every scale</a:t>
             </a:r>
           </a:p>
         </p:txBody>
@@ -16847,7 +16847,7 @@
                 </a:solidFill>
                 <a:latin typeface="Inter"/>
               </a:rPr>
-              <a:t>₹2.8 K</a:t>
+              <a:t>₹396</a:t>
             </a:r>
           </a:p>
         </p:txBody>
@@ -16930,7 +16930,7 @@
                 </a:solidFill>
                 <a:latin typeface="Inter"/>
               </a:rPr>
-              <a:t>₹11.8 K</a:t>
+              <a:t>₹4.0 K</a:t>
             </a:r>
           </a:p>
         </p:txBody>
@@ -17013,7 +17013,7 @@
                 </a:solidFill>
                 <a:latin typeface="Inter"/>
               </a:rPr>
-              <a:t>₹81 K</a:t>
+              <a:t>₹39.6 K</a:t>
             </a:r>
           </a:p>
         </p:txBody>
@@ -17096,7 +17096,7 @@
                 </a:solidFill>
                 <a:latin typeface="Inter"/>
               </a:rPr>
-              <a:t>₹39 Cr</a:t>
+              <a:t>₹39.6 L</a:t>
             </a:r>
           </a:p>
         </p:txBody>
@@ -17262,7 +17262,7 @@
                 </a:solidFill>
                 <a:latin typeface="Inter"/>
               </a:rPr>
-              <a:t>₹51 K</a:t>
+              <a:t>₹38.7 K</a:t>
             </a:r>
           </a:p>
         </p:txBody>
@@ -17345,7 +17345,7 @@
                 </a:solidFill>
                 <a:latin typeface="Inter"/>
               </a:rPr>
-              <a:t>₹5.1 L</a:t>
+              <a:t>₹3.9 L</a:t>
             </a:r>
           </a:p>
         </p:txBody>
@@ -17428,7 +17428,7 @@
                 </a:solidFill>
                 <a:latin typeface="Inter"/>
               </a:rPr>
-              <a:t>₹51 L</a:t>
+              <a:t>₹38.7 L</a:t>
             </a:r>
           </a:p>
         </p:txBody>
@@ -17511,7 +17511,7 @@
                 </a:solidFill>
                 <a:latin typeface="Inter"/>
               </a:rPr>
-              <a:t>₹51 Cr</a:t>
+              <a:t>₹38.7 Cr</a:t>
             </a:r>
           </a:p>
         </p:txBody>
@@ -17677,7 +17677,7 @@
                 </a:solidFill>
                 <a:latin typeface="Inter"/>
               </a:rPr>
-              <a:t>₹48 K</a:t>
+              <a:t>₹38.3 K</a:t>
             </a:r>
           </a:p>
         </p:txBody>
@@ -17760,7 +17760,7 @@
                 </a:solidFill>
                 <a:latin typeface="Inter"/>
               </a:rPr>
-              <a:t>₹5.0 L</a:t>
+              <a:t>₹3.8 L</a:t>
             </a:r>
           </a:p>
         </p:txBody>
@@ -17843,7 +17843,7 @@
                 </a:solidFill>
                 <a:latin typeface="Inter"/>
               </a:rPr>
-              <a:t>₹50 L</a:t>
+              <a:t>₹38.3 L</a:t>
             </a:r>
           </a:p>
         </p:txBody>
@@ -17926,7 +17926,7 @@
                 </a:solidFill>
                 <a:latin typeface="Inter"/>
               </a:rPr>
-              <a:t>₹50 Cr</a:t>
+              <a:t>₹38.3 Cr</a:t>
             </a:r>
           </a:p>
         </p:txBody>
@@ -18048,7 +18048,7 @@
                 </a:solidFill>
                 <a:latin typeface="Inter Tight"/>
               </a:rPr>
-              <a:t>94.5%</a:t>
+              <a:t>99.0%</a:t>
             </a:r>
           </a:p>
         </p:txBody>
@@ -18131,7 +18131,7 @@
                 </a:solidFill>
                 <a:latin typeface="Inter Tight"/>
               </a:rPr>
-              <a:t>97.7%</a:t>
+              <a:t>99.0%</a:t>
             </a:r>
           </a:p>
         </p:txBody>
@@ -18214,7 +18214,7 @@
                 </a:solidFill>
                 <a:latin typeface="Inter Tight"/>
               </a:rPr>
-              <a:t>98.4%</a:t>
+              <a:t>99.0%</a:t>
             </a:r>
           </a:p>
         </p:txBody>
@@ -18297,7 +18297,7 @@
                 </a:solidFill>
                 <a:latin typeface="Inter Tight"/>
               </a:rPr>
-              <a:t>99.2%</a:t>
+              <a:t>99.0%</a:t>
             </a:r>
           </a:p>
         </p:txBody>
@@ -18375,7 +18375,7 @@
                 </a:solidFill>
                 <a:latin typeface="Inter"/>
               </a:rPr>
-              <a:t>Compressed-only pipeline (~275 KB / photo) on Cloudflare R2 (zero egress) + Workers. 30-day retention. Excludes payment-processor fees and CAC.</a:t>
+              <a:t>Compressed-only pipeline (~250 KB / photo) on Cloudflare R2 (zero egress). 30-day retention. ARPU shown at launch pricing (₹149–₹299/album); regular pricing (₹199–₹399) lifts ARPU to ₹459/mo. Excludes payment-processor fees and CAC.</a:t>
             </a:r>
           </a:p>
         </p:txBody>
@@ -18981,7 +18981,7 @@
                 </a:solidFill>
                 <a:latin typeface="Inter"/>
               </a:rPr>
-              <a:t>20K active photographers × ₹6K avg annual spend ≈ ₹120 Cr GMV</a:t>
+              <a:t>20K active photographers × ₹5.5K avg annual spend ≈ ₹11 Cr ARR at regular pricing (~₹9 Cr at launch). Scaling to 200K photographers ⇒ ₹110 Cr ARR.</a:t>
             </a:r>
           </a:p>
         </p:txBody>
